--- a/classes/parte-13-seguridad-movil-iot-e-inalambrica/275-seguridad-de-dispositivos-medicos/clase-275-presentacion.pptx
+++ b/classes/parte-13-seguridad-movil-iot-e-inalambrica/275-seguridad-de-dispositivos-medicos/clase-275-presentacion.pptx
@@ -17,6 +17,10 @@
     <p:sldId id="265" r:id="rId16"/>
     <p:sldId id="266" r:id="rId17"/>
     <p:sldId id="267" r:id="rId18"/>
+    <p:sldId id="268" r:id="rId19"/>
+    <p:sldId id="269" r:id="rId20"/>
+    <p:sldId id="270" r:id="rId21"/>
+    <p:sldId id="271" r:id="rId22"/>
   </p:sldIdLst>
   <p:sldSz cx="9144000" cy="6858000" type="screen4x3"/>
   <p:notesSz cx="6858000" cy="9144000"/>
@@ -3198,7 +3202,7 @@
                   <a:srgbClr val="0B3D2E"/>
                 </a:solidFill>
               </a:rPr>
-              <a:t>⚠️ Errores comunes</a:t>
+              <a:t>🧪 Laboratorio guiado</a:t>
             </a:r>
           </a:p>
         </p:txBody>
@@ -3236,82 +3240,97 @@
                   <a:srgbClr val="22282E"/>
                 </a:solidFill>
               </a:rPr>
-              <a:t>•  Síntoma / problema — Causa y cómo abordarlo</a:t>
-            </a:r>
-          </a:p>
-          <a:p>
-            <a:pPr>
-              <a:spcAft>
-                <a:spcPts val="600"/>
-              </a:spcAft>
-            </a:pPr>
-            <a:r>
-              <a:rPr sz="1500">
-                <a:solidFill>
-                  <a:srgbClr val="22282E"/>
-                </a:solidFill>
-              </a:rPr>
-              <a:t>•  Probar hardware clínico activo — Riesgo a vidas y delito; usa solo unidades de laboratorio o análisis de casos</a:t>
-            </a:r>
-          </a:p>
-          <a:p>
-            <a:pPr>
-              <a:spcAft>
-                <a:spcPts val="600"/>
-              </a:spcAft>
-            </a:pPr>
-            <a:r>
-              <a:rPr sz="1500">
-                <a:solidFill>
-                  <a:srgbClr val="22282E"/>
-                </a:solidFill>
-              </a:rPr>
-              <a:t>•  Tratar security y safety por separado — En medicina se integran; modela ambas juntas</a:t>
-            </a:r>
-          </a:p>
-          <a:p>
-            <a:pPr>
-              <a:spcAft>
-                <a:spcPts val="600"/>
-              </a:spcAft>
-            </a:pPr>
-            <a:r>
-              <a:rPr sz="1500">
-                <a:solidFill>
-                  <a:srgbClr val="22282E"/>
-                </a:solidFill>
-              </a:rPr>
-              <a:t>•  Publicar el exploit sin coordinar — Puede causar daño; sigue divulgación coordinada con el fabricante</a:t>
-            </a:r>
-          </a:p>
-          <a:p>
-            <a:pPr>
-              <a:spcAft>
-                <a:spcPts val="600"/>
-              </a:spcAft>
-            </a:pPr>
-            <a:r>
-              <a:rPr sz="1500">
-                <a:solidFill>
-                  <a:srgbClr val="22282E"/>
-                </a:solidFill>
-              </a:rPr>
-              <a:t>•  Ignorar el ciclo de vida largo — Dispositivos operan décadas; planifica parcheo y SBOM</a:t>
-            </a:r>
-          </a:p>
-          <a:p>
-            <a:pPr>
-              <a:spcAft>
-                <a:spcPts val="600"/>
-              </a:spcAft>
-            </a:pPr>
-            <a:r>
-              <a:rPr sz="1500">
-                <a:solidFill>
-                  <a:srgbClr val="22282E"/>
-                </a:solidFill>
-              </a:rPr>
-              <a:t>•  Asumir red aislada — Los hospitales están cada vez más conectados; aplica IEC 80001</a:t>
+              <a:t>•  Elige un caso público documentado (p. ej. vulnerabilidades divulgadas en bombas de infusión o marcapasos) a partir de avisos de la FDA/ICS-CERT (CISA).</a:t>
+            </a:r>
+          </a:p>
+          <a:p>
+            <a:pPr>
+              <a:spcAft>
+                <a:spcPts val="600"/>
+              </a:spcAft>
+            </a:pPr>
+            <a:r>
+              <a:rPr sz="1500">
+                <a:solidFill>
+                  <a:srgbClr val="22282E"/>
+                </a:solidFill>
+              </a:rPr>
+              <a:t>•  Modela la amenaza: identifica activos (paciente, dosis, telemetría), vectores (RF, red, físico) y consecuencias de safety.</a:t>
+            </a:r>
+          </a:p>
+          <a:p>
+            <a:pPr>
+              <a:spcAft>
+                <a:spcPts val="600"/>
+              </a:spcAft>
+            </a:pPr>
+            <a:r>
+              <a:rPr sz="1500">
+                <a:solidFill>
+                  <a:srgbClr val="22282E"/>
+                </a:solidFill>
+              </a:rPr>
+              <a:t>•  Mapea la superficie de ataque por capas (app clínica, red hospitalaria, RF del implante, firmware) reutilizando el enfoque de la clase 266.</a:t>
+            </a:r>
+          </a:p>
+          <a:p>
+            <a:pPr>
+              <a:spcAft>
+                <a:spcPts val="600"/>
+              </a:spcAft>
+            </a:pPr>
+            <a:r>
+              <a:rPr sz="1500">
+                <a:solidFill>
+                  <a:srgbClr val="22282E"/>
+                </a:solidFill>
+              </a:rPr>
+              <a:t>•  Evalúa controles existentes: cifrado de telemetría, autenticación, límites de dosis codificados por hardware, watchdog.</a:t>
+            </a:r>
+          </a:p>
+          <a:p>
+            <a:pPr>
+              <a:spcAft>
+                <a:spcPts val="600"/>
+              </a:spcAft>
+            </a:pPr>
+            <a:r>
+              <a:rPr sz="1500">
+                <a:solidFill>
+                  <a:srgbClr val="22282E"/>
+                </a:solidFill>
+              </a:rPr>
+              <a:t>•  Aplica el marco regulatorio: relaciona el caso con requisitos de la guía de la FDA, IEC 62304 y IEC 80001.</a:t>
+            </a:r>
+          </a:p>
+          <a:p>
+            <a:pPr>
+              <a:spcAft>
+                <a:spcPts val="600"/>
+              </a:spcAft>
+            </a:pPr>
+            <a:r>
+              <a:rPr sz="1500">
+                <a:solidFill>
+                  <a:srgbClr val="22282E"/>
+                </a:solidFill>
+              </a:rPr>
+              <a:t>•  Redacta una divulgación coordinada: simula un informe responsable dirigido al fabricante (impacto, reproducción a alto nivel, plazo, sin exploit público).</a:t>
+            </a:r>
+          </a:p>
+          <a:p>
+            <a:pPr>
+              <a:spcAft>
+                <a:spcPts val="600"/>
+              </a:spcAft>
+            </a:pPr>
+            <a:r>
+              <a:rPr sz="1500">
+                <a:solidFill>
+                  <a:srgbClr val="22282E"/>
+                </a:solidFill>
+              </a:rPr>
+              <a:t>•  Propón mitigaciones: SBOM, segmentación de red clínica, actualizaciones firmadas, límites de seguridad físicos.</a:t>
             </a:r>
           </a:p>
         </p:txBody>
@@ -3362,7 +3381,7 @@
                   <a:srgbClr val="0B3D2E"/>
                 </a:solidFill>
               </a:rPr>
-              <a:t>❓ Preguntas frecuentes</a:t>
+              <a:t>✍️ Ejercicios</a:t>
             </a:r>
           </a:p>
         </p:txBody>
@@ -3400,82 +3419,82 @@
                   <a:srgbClr val="22282E"/>
                 </a:solidFill>
               </a:rPr>
-              <a:t>•  ❓ ¿Por qué la seguridad de dispositivos médicos es diferente de otro IoT?</a:t>
-            </a:r>
-          </a:p>
-          <a:p>
-            <a:pPr>
-              <a:spcAft>
-                <a:spcPts val="600"/>
-              </a:spcAft>
-            </a:pPr>
-            <a:r>
-              <a:rPr sz="1500">
-                <a:solidFill>
-                  <a:srgbClr val="22282E"/>
-                </a:solidFill>
-              </a:rPr>
-              <a:t>•  Porque el impacto es directo sobre la salud y la vida del paciente, el ciclo de vida es larguísimo, el parcheo es difícil (requiere revalidación clínica) y hay regulación estricta.</a:t>
-            </a:r>
-          </a:p>
-          <a:p>
-            <a:pPr>
-              <a:spcAft>
-                <a:spcPts val="600"/>
-              </a:spcAft>
-            </a:pPr>
-            <a:r>
-              <a:rPr sz="1500">
-                <a:solidFill>
-                  <a:srgbClr val="22282E"/>
-                </a:solidFill>
-              </a:rPr>
-              <a:t>•  ❓ ¿Puedo investigar la seguridad de un dispositivo médico legalmente?</a:t>
-            </a:r>
-          </a:p>
-          <a:p>
-            <a:pPr>
-              <a:spcAft>
-                <a:spcPts val="600"/>
-              </a:spcAft>
-            </a:pPr>
-            <a:r>
-              <a:rPr sz="1500">
-                <a:solidFill>
-                  <a:srgbClr val="22282E"/>
-                </a:solidFill>
-              </a:rPr>
-              <a:t>•  Sí, sobre unidades propias/retiradas de servicio y siguiendo divulgación coordinada. Muchos fabricantes tienen programas de reporte. Nunca sobre dispositivos conectados a pacientes.</a:t>
-            </a:r>
-          </a:p>
-          <a:p>
-            <a:pPr>
-              <a:spcAft>
-                <a:spcPts val="600"/>
-              </a:spcAft>
-            </a:pPr>
-            <a:r>
-              <a:rPr sz="1500">
-                <a:solidFill>
-                  <a:srgbClr val="22282E"/>
-                </a:solidFill>
-              </a:rPr>
-              <a:t>•  ❓ ¿Qué papel juega el SBOM?</a:t>
-            </a:r>
-          </a:p>
-          <a:p>
-            <a:pPr>
-              <a:spcAft>
-                <a:spcPts val="600"/>
-              </a:spcAft>
-            </a:pPr>
-            <a:r>
-              <a:rPr sz="1500">
-                <a:solidFill>
-                  <a:srgbClr val="22282E"/>
-                </a:solidFill>
-              </a:rPr>
-              <a:t>•  Permite saber qué componentes de terceros usa el dispositivo para reaccionar cuando aparece una vulnerabilidad en una librería, algo crítico dado su ciclo de vida prolongado.</a:t>
+              <a:t>•  Enumera la superficie de ataque de un marcapasos con telemetría inalámbrica.</a:t>
+            </a:r>
+          </a:p>
+          <a:p>
+            <a:pPr>
+              <a:spcAft>
+                <a:spcPts val="600"/>
+              </a:spcAft>
+            </a:pPr>
+            <a:r>
+              <a:rPr sz="1500">
+                <a:solidFill>
+                  <a:srgbClr val="22282E"/>
+                </a:solidFill>
+              </a:rPr>
+              <a:t>•  Explica por qué en medicina la seguridad es un requisito de safety.</a:t>
+            </a:r>
+          </a:p>
+          <a:p>
+            <a:pPr>
+              <a:spcAft>
+                <a:spcPts val="600"/>
+              </a:spcAft>
+            </a:pPr>
+            <a:r>
+              <a:rPr sz="1500">
+                <a:solidFill>
+                  <a:srgbClr val="22282E"/>
+                </a:solidFill>
+              </a:rPr>
+              <a:t>•  Resume una vulnerabilidad médica real divulgada y su impacto potencial.</a:t>
+            </a:r>
+          </a:p>
+          <a:p>
+            <a:pPr>
+              <a:spcAft>
+                <a:spcPts val="600"/>
+              </a:spcAft>
+            </a:pPr>
+            <a:r>
+              <a:rPr sz="1500">
+                <a:solidFill>
+                  <a:srgbClr val="22282E"/>
+                </a:solidFill>
+              </a:rPr>
+              <a:t>•  Relaciona un hallazgo con IEC 62304 e IEC 80001.</a:t>
+            </a:r>
+          </a:p>
+          <a:p>
+            <a:pPr>
+              <a:spcAft>
+                <a:spcPts val="600"/>
+              </a:spcAft>
+            </a:pPr>
+            <a:r>
+              <a:rPr sz="1500">
+                <a:solidFill>
+                  <a:srgbClr val="22282E"/>
+                </a:solidFill>
+              </a:rPr>
+              <a:t>•  Redacta un borrador de aviso de divulgación coordinada.</a:t>
+            </a:r>
+          </a:p>
+          <a:p>
+            <a:pPr>
+              <a:spcAft>
+                <a:spcPts val="600"/>
+              </a:spcAft>
+            </a:pPr>
+            <a:r>
+              <a:rPr sz="1500">
+                <a:solidFill>
+                  <a:srgbClr val="22282E"/>
+                </a:solidFill>
+              </a:rPr>
+              <a:t>•  Diseña un límite de seguridad de hardware que evite una sobredosis por software.</a:t>
             </a:r>
           </a:p>
         </p:txBody>
@@ -3526,7 +3545,7 @@
                   <a:srgbClr val="0B3D2E"/>
                 </a:solidFill>
               </a:rPr>
-              <a:t>🔗 Referencias</a:t>
+              <a:t>📝 Reto verificable</a:t>
             </a:r>
           </a:p>
         </p:txBody>
@@ -3564,7 +3583,424 @@
                   <a:srgbClr val="22282E"/>
                 </a:solidFill>
               </a:rPr>
-              <a:t>•  FDA — Cybersecurity in Medical Devices: &lt;https://www.fda.gov/medical-devices/digital-health-center-excellence/cybersecurity&gt;</a:t>
+              <a:t>•  Elabora un informe de evaluación de riesgo y divulgación coordinada para un dispositivo médico (basado en un caso público o una unidad de laboratorio propia). Criterio de aceptación: el informe…</a:t>
+            </a:r>
+          </a:p>
+        </p:txBody>
+      </p:sp>
+    </p:spTree>
+  </p:cSld>
+  <p:clrMapOvr>
+    <a:masterClrMapping/>
+  </p:clrMapOvr>
+</p:sld>
+</file>
+
+<file path=ppt/slides/slide13.xml><?xml version="1.0" encoding="utf-8"?>
+<p:sld xmlns:a="http://schemas.openxmlformats.org/drawingml/2006/main" xmlns:p="http://schemas.openxmlformats.org/presentationml/2006/main" xmlns:r="http://schemas.openxmlformats.org/officeDocument/2006/relationships">
+  <p:cSld>
+    <p:spTree>
+      <p:nvGrpSpPr>
+        <p:cNvPr id="1" name=""/>
+        <p:cNvGrpSpPr/>
+        <p:nvPr/>
+      </p:nvGrpSpPr>
+      <p:grpSpPr/>
+      <p:sp>
+        <p:nvSpPr>
+          <p:cNvPr id="2" name="TextBox 1"/>
+          <p:cNvSpPr txBox="1"/>
+          <p:nvPr/>
+        </p:nvSpPr>
+        <p:spPr>
+          <a:xfrm>
+            <a:off x="457200" y="320040"/>
+            <a:ext cx="8229600" cy="822960"/>
+          </a:xfrm>
+          <a:prstGeom prst="rect">
+            <a:avLst/>
+          </a:prstGeom>
+          <a:noFill/>
+        </p:spPr>
+        <p:txBody>
+          <a:bodyPr wrap="square">
+            <a:spAutoFit/>
+          </a:bodyPr>
+          <a:lstStyle/>
+          <a:p>
+            <a:r>
+              <a:rPr sz="2600" b="1">
+                <a:solidFill>
+                  <a:srgbClr val="0B3D2E"/>
+                </a:solidFill>
+              </a:rPr>
+              <a:t>⚠️ Errores comunes</a:t>
+            </a:r>
+          </a:p>
+        </p:txBody>
+      </p:sp>
+      <p:sp>
+        <p:nvSpPr>
+          <p:cNvPr id="3" name="TextBox 2"/>
+          <p:cNvSpPr txBox="1"/>
+          <p:nvPr/>
+        </p:nvSpPr>
+        <p:spPr>
+          <a:xfrm>
+            <a:off x="457200" y="1280160"/>
+            <a:ext cx="8229600" cy="4937760"/>
+          </a:xfrm>
+          <a:prstGeom prst="rect">
+            <a:avLst/>
+          </a:prstGeom>
+          <a:noFill/>
+        </p:spPr>
+        <p:txBody>
+          <a:bodyPr wrap="square">
+            <a:spAutoFit/>
+          </a:bodyPr>
+          <a:lstStyle/>
+          <a:p>
+            <a:pPr>
+              <a:spcAft>
+                <a:spcPts val="600"/>
+              </a:spcAft>
+            </a:pPr>
+            <a:r>
+              <a:rPr sz="1500">
+                <a:solidFill>
+                  <a:srgbClr val="22282E"/>
+                </a:solidFill>
+              </a:rPr>
+              <a:t>•  Síntoma / problema — Causa y cómo abordarlo</a:t>
+            </a:r>
+          </a:p>
+          <a:p>
+            <a:pPr>
+              <a:spcAft>
+                <a:spcPts val="600"/>
+              </a:spcAft>
+            </a:pPr>
+            <a:r>
+              <a:rPr sz="1500">
+                <a:solidFill>
+                  <a:srgbClr val="22282E"/>
+                </a:solidFill>
+              </a:rPr>
+              <a:t>•  Probar hardware clínico activo — Riesgo a vidas y delito; usa solo unidades de laboratorio o análisis de casos</a:t>
+            </a:r>
+          </a:p>
+          <a:p>
+            <a:pPr>
+              <a:spcAft>
+                <a:spcPts val="600"/>
+              </a:spcAft>
+            </a:pPr>
+            <a:r>
+              <a:rPr sz="1500">
+                <a:solidFill>
+                  <a:srgbClr val="22282E"/>
+                </a:solidFill>
+              </a:rPr>
+              <a:t>•  Tratar security y safety por separado — En medicina se integran; modela ambas juntas</a:t>
+            </a:r>
+          </a:p>
+          <a:p>
+            <a:pPr>
+              <a:spcAft>
+                <a:spcPts val="600"/>
+              </a:spcAft>
+            </a:pPr>
+            <a:r>
+              <a:rPr sz="1500">
+                <a:solidFill>
+                  <a:srgbClr val="22282E"/>
+                </a:solidFill>
+              </a:rPr>
+              <a:t>•  Publicar el exploit sin coordinar — Puede causar daño; sigue divulgación coordinada con el fabricante</a:t>
+            </a:r>
+          </a:p>
+          <a:p>
+            <a:pPr>
+              <a:spcAft>
+                <a:spcPts val="600"/>
+              </a:spcAft>
+            </a:pPr>
+            <a:r>
+              <a:rPr sz="1500">
+                <a:solidFill>
+                  <a:srgbClr val="22282E"/>
+                </a:solidFill>
+              </a:rPr>
+              <a:t>•  Ignorar el ciclo de vida largo — Dispositivos operan décadas; planifica parcheo y SBOM</a:t>
+            </a:r>
+          </a:p>
+          <a:p>
+            <a:pPr>
+              <a:spcAft>
+                <a:spcPts val="600"/>
+              </a:spcAft>
+            </a:pPr>
+            <a:r>
+              <a:rPr sz="1500">
+                <a:solidFill>
+                  <a:srgbClr val="22282E"/>
+                </a:solidFill>
+              </a:rPr>
+              <a:t>•  Asumir red aislada — Los hospitales están cada vez más conectados; aplica IEC 80001</a:t>
+            </a:r>
+          </a:p>
+        </p:txBody>
+      </p:sp>
+    </p:spTree>
+  </p:cSld>
+  <p:clrMapOvr>
+    <a:masterClrMapping/>
+  </p:clrMapOvr>
+</p:sld>
+</file>
+
+<file path=ppt/slides/slide14.xml><?xml version="1.0" encoding="utf-8"?>
+<p:sld xmlns:a="http://schemas.openxmlformats.org/drawingml/2006/main" xmlns:p="http://schemas.openxmlformats.org/presentationml/2006/main" xmlns:r="http://schemas.openxmlformats.org/officeDocument/2006/relationships">
+  <p:cSld>
+    <p:spTree>
+      <p:nvGrpSpPr>
+        <p:cNvPr id="1" name=""/>
+        <p:cNvGrpSpPr/>
+        <p:nvPr/>
+      </p:nvGrpSpPr>
+      <p:grpSpPr/>
+      <p:sp>
+        <p:nvSpPr>
+          <p:cNvPr id="2" name="TextBox 1"/>
+          <p:cNvSpPr txBox="1"/>
+          <p:nvPr/>
+        </p:nvSpPr>
+        <p:spPr>
+          <a:xfrm>
+            <a:off x="457200" y="320040"/>
+            <a:ext cx="8229600" cy="822960"/>
+          </a:xfrm>
+          <a:prstGeom prst="rect">
+            <a:avLst/>
+          </a:prstGeom>
+          <a:noFill/>
+        </p:spPr>
+        <p:txBody>
+          <a:bodyPr wrap="square">
+            <a:spAutoFit/>
+          </a:bodyPr>
+          <a:lstStyle/>
+          <a:p>
+            <a:r>
+              <a:rPr sz="2600" b="1">
+                <a:solidFill>
+                  <a:srgbClr val="0B3D2E"/>
+                </a:solidFill>
+              </a:rPr>
+              <a:t>❓ Preguntas frecuentes</a:t>
+            </a:r>
+          </a:p>
+        </p:txBody>
+      </p:sp>
+      <p:sp>
+        <p:nvSpPr>
+          <p:cNvPr id="3" name="TextBox 2"/>
+          <p:cNvSpPr txBox="1"/>
+          <p:nvPr/>
+        </p:nvSpPr>
+        <p:spPr>
+          <a:xfrm>
+            <a:off x="457200" y="1280160"/>
+            <a:ext cx="8229600" cy="4937760"/>
+          </a:xfrm>
+          <a:prstGeom prst="rect">
+            <a:avLst/>
+          </a:prstGeom>
+          <a:noFill/>
+        </p:spPr>
+        <p:txBody>
+          <a:bodyPr wrap="square">
+            <a:spAutoFit/>
+          </a:bodyPr>
+          <a:lstStyle/>
+          <a:p>
+            <a:pPr>
+              <a:spcAft>
+                <a:spcPts val="600"/>
+              </a:spcAft>
+            </a:pPr>
+            <a:r>
+              <a:rPr sz="1500">
+                <a:solidFill>
+                  <a:srgbClr val="22282E"/>
+                </a:solidFill>
+              </a:rPr>
+              <a:t>•  ❓ ¿Por qué la seguridad de dispositivos médicos es diferente de otro IoT?</a:t>
+            </a:r>
+          </a:p>
+          <a:p>
+            <a:pPr>
+              <a:spcAft>
+                <a:spcPts val="600"/>
+              </a:spcAft>
+            </a:pPr>
+            <a:r>
+              <a:rPr sz="1500">
+                <a:solidFill>
+                  <a:srgbClr val="22282E"/>
+                </a:solidFill>
+              </a:rPr>
+              <a:t>•  Porque el impacto es directo sobre la salud y la vida del paciente, el ciclo de vida es larguísimo, el parcheo es difícil (requiere revalidación clínica) y hay regulación estricta.</a:t>
+            </a:r>
+          </a:p>
+          <a:p>
+            <a:pPr>
+              <a:spcAft>
+                <a:spcPts val="600"/>
+              </a:spcAft>
+            </a:pPr>
+            <a:r>
+              <a:rPr sz="1500">
+                <a:solidFill>
+                  <a:srgbClr val="22282E"/>
+                </a:solidFill>
+              </a:rPr>
+              <a:t>•  ❓ ¿Puedo investigar la seguridad de un dispositivo médico legalmente?</a:t>
+            </a:r>
+          </a:p>
+          <a:p>
+            <a:pPr>
+              <a:spcAft>
+                <a:spcPts val="600"/>
+              </a:spcAft>
+            </a:pPr>
+            <a:r>
+              <a:rPr sz="1500">
+                <a:solidFill>
+                  <a:srgbClr val="22282E"/>
+                </a:solidFill>
+              </a:rPr>
+              <a:t>•  Sí, sobre unidades propias/retiradas de servicio y siguiendo divulgación coordinada. Muchos fabricantes tienen programas de reporte. Nunca sobre dispositivos conectados a pacientes.</a:t>
+            </a:r>
+          </a:p>
+          <a:p>
+            <a:pPr>
+              <a:spcAft>
+                <a:spcPts val="600"/>
+              </a:spcAft>
+            </a:pPr>
+            <a:r>
+              <a:rPr sz="1500">
+                <a:solidFill>
+                  <a:srgbClr val="22282E"/>
+                </a:solidFill>
+              </a:rPr>
+              <a:t>•  ❓ ¿Qué papel juega el SBOM?</a:t>
+            </a:r>
+          </a:p>
+          <a:p>
+            <a:pPr>
+              <a:spcAft>
+                <a:spcPts val="600"/>
+              </a:spcAft>
+            </a:pPr>
+            <a:r>
+              <a:rPr sz="1500">
+                <a:solidFill>
+                  <a:srgbClr val="22282E"/>
+                </a:solidFill>
+              </a:rPr>
+              <a:t>•  Permite saber qué componentes de terceros usa el dispositivo para reaccionar cuando aparece una vulnerabilidad en una librería, algo crítico dado su ciclo de vida prolongado.</a:t>
+            </a:r>
+          </a:p>
+        </p:txBody>
+      </p:sp>
+    </p:spTree>
+  </p:cSld>
+  <p:clrMapOvr>
+    <a:masterClrMapping/>
+  </p:clrMapOvr>
+</p:sld>
+</file>
+
+<file path=ppt/slides/slide15.xml><?xml version="1.0" encoding="utf-8"?>
+<p:sld xmlns:a="http://schemas.openxmlformats.org/drawingml/2006/main" xmlns:p="http://schemas.openxmlformats.org/presentationml/2006/main" xmlns:r="http://schemas.openxmlformats.org/officeDocument/2006/relationships">
+  <p:cSld>
+    <p:spTree>
+      <p:nvGrpSpPr>
+        <p:cNvPr id="1" name=""/>
+        <p:cNvGrpSpPr/>
+        <p:nvPr/>
+      </p:nvGrpSpPr>
+      <p:grpSpPr/>
+      <p:sp>
+        <p:nvSpPr>
+          <p:cNvPr id="2" name="TextBox 1"/>
+          <p:cNvSpPr txBox="1"/>
+          <p:nvPr/>
+        </p:nvSpPr>
+        <p:spPr>
+          <a:xfrm>
+            <a:off x="457200" y="320040"/>
+            <a:ext cx="8229600" cy="822960"/>
+          </a:xfrm>
+          <a:prstGeom prst="rect">
+            <a:avLst/>
+          </a:prstGeom>
+          <a:noFill/>
+        </p:spPr>
+        <p:txBody>
+          <a:bodyPr wrap="square">
+            <a:spAutoFit/>
+          </a:bodyPr>
+          <a:lstStyle/>
+          <a:p>
+            <a:r>
+              <a:rPr sz="2600" b="1">
+                <a:solidFill>
+                  <a:srgbClr val="0B3D2E"/>
+                </a:solidFill>
+              </a:rPr>
+              <a:t>🔗 Referencias</a:t>
+            </a:r>
+          </a:p>
+        </p:txBody>
+      </p:sp>
+      <p:sp>
+        <p:nvSpPr>
+          <p:cNvPr id="3" name="TextBox 2"/>
+          <p:cNvSpPr txBox="1"/>
+          <p:nvPr/>
+        </p:nvSpPr>
+        <p:spPr>
+          <a:xfrm>
+            <a:off x="457200" y="1280160"/>
+            <a:ext cx="8229600" cy="4937760"/>
+          </a:xfrm>
+          <a:prstGeom prst="rect">
+            <a:avLst/>
+          </a:prstGeom>
+          <a:noFill/>
+        </p:spPr>
+        <p:txBody>
+          <a:bodyPr wrap="square">
+            <a:spAutoFit/>
+          </a:bodyPr>
+          <a:lstStyle/>
+          <a:p>
+            <a:pPr>
+              <a:spcAft>
+                <a:spcPts val="600"/>
+              </a:spcAft>
+            </a:pPr>
+            <a:r>
+              <a:rPr sz="1500">
+                <a:solidFill>
+                  <a:srgbClr val="22282E"/>
+                </a:solidFill>
+              </a:rPr>
+              <a:t>•  FDA — Cybersecurity in Medical Devices, guía final vigente…</a:t>
             </a:r>
           </a:p>
           <a:p>
@@ -3614,6 +4050,81 @@
           </a:p>
         </p:txBody>
       </p:sp>
+    </p:spTree>
+  </p:cSld>
+  <p:clrMapOvr>
+    <a:masterClrMapping/>
+  </p:clrMapOvr>
+</p:sld>
+</file>
+
+<file path=ppt/slides/slide16.xml><?xml version="1.0" encoding="utf-8"?>
+<p:sld xmlns:a="http://schemas.openxmlformats.org/drawingml/2006/main" xmlns:p="http://schemas.openxmlformats.org/presentationml/2006/main" xmlns:r="http://schemas.openxmlformats.org/officeDocument/2006/relationships">
+  <p:cSld>
+    <p:spTree>
+      <p:nvGrpSpPr>
+        <p:cNvPr id="1" name=""/>
+        <p:cNvGrpSpPr/>
+        <p:nvPr/>
+      </p:nvGrpSpPr>
+      <p:grpSpPr/>
+      <p:sp>
+        <p:nvSpPr>
+          <p:cNvPr id="2" name="TextBox 1"/>
+          <p:cNvSpPr txBox="1"/>
+          <p:nvPr/>
+        </p:nvSpPr>
+        <p:spPr>
+          <a:xfrm>
+            <a:off x="457200" y="274320"/>
+            <a:ext cx="8229600" cy="640080"/>
+          </a:xfrm>
+          <a:prstGeom prst="rect">
+            <a:avLst/>
+          </a:prstGeom>
+          <a:noFill/>
+        </p:spPr>
+        <p:txBody>
+          <a:bodyPr wrap="square">
+            <a:spAutoFit/>
+          </a:bodyPr>
+          <a:lstStyle/>
+          <a:p>
+            <a:r>
+              <a:rPr sz="2200" b="1">
+                <a:solidFill>
+                  <a:srgbClr val="0B3D2E"/>
+                </a:solidFill>
+              </a:rPr>
+              <a:t>Diagrama de la clase</a:t>
+            </a:r>
+          </a:p>
+        </p:txBody>
+      </p:sp>
+      <p:pic>
+        <p:nvPicPr>
+          <p:cNvPr id="3" name="Picture 2" descr="062092df0638513d.png"/>
+          <p:cNvPicPr>
+            <a:picLocks noChangeAspect="1"/>
+          </p:cNvPicPr>
+          <p:nvPr/>
+        </p:nvPicPr>
+        <p:blipFill>
+          <a:blip r:embed="rId2"/>
+          <a:stretch>
+            <a:fillRect/>
+          </a:stretch>
+        </p:blipFill>
+        <p:spPr>
+          <a:xfrm>
+            <a:off x="457200" y="3323844"/>
+            <a:ext cx="8229600" cy="850392"/>
+          </a:xfrm>
+          <a:prstGeom prst="rect">
+            <a:avLst/>
+          </a:prstGeom>
+        </p:spPr>
+      </p:pic>
     </p:spTree>
   </p:cSld>
   <p:clrMapOvr>
@@ -3698,7 +4209,7 @@
                   <a:srgbClr val="22282E"/>
                 </a:solidFill>
               </a:rPr>
-              <a:t>•  Comprender los riesgos de ciberseguridad únicos de los dispositivos médicos —donde un fallo puede causar daño físico directo a un paciente— y cómo se evalúan y regulan. El alumno estudiará la superficie de ataque de dispositivos implantables (marcapasos, bombas de insulina) y hospitalarios (bombas de infusión, monitores), los estándares y regulaciones aplicables (FDA, IEC 62304/80001, MDR), y el marco ético/legal que hace de esta un área especialmente sensible.</a:t>
+              <a:t>•  Comprender los riesgos de ciberseguridad únicos de los dispositivos médicos —donde un fallo puede causar daño físico directo a un paciente— y cómo se evalúan y regulan. El alumno estudiará la…</a:t>
             </a:r>
           </a:p>
         </p:txBody>
@@ -4107,7 +4618,7 @@
                   <a:srgbClr val="0B3D2E"/>
                 </a:solidFill>
               </a:rPr>
-              <a:t>📖 Definiciones y características</a:t>
+              <a:t>🧠 Explicación en profundidad</a:t>
             </a:r>
           </a:p>
         </p:txBody>
@@ -4145,82 +4656,67 @@
                   <a:srgbClr val="22282E"/>
                 </a:solidFill>
               </a:rPr>
-              <a:t>•  Dispositivo médico implantable (IMD): dispositivo dentro del cuerpo (marcapasos, DAI) con telemetría inalámbrica. Característica: restricciones severas de energía y de seguridad del paciente.</a:t>
-            </a:r>
-          </a:p>
-          <a:p>
-            <a:pPr>
-              <a:spcAft>
-                <a:spcPts val="600"/>
-              </a:spcAft>
-            </a:pPr>
-            <a:r>
-              <a:rPr sz="1500">
-                <a:solidFill>
-                  <a:srgbClr val="22282E"/>
-                </a:solidFill>
-              </a:rPr>
-              <a:t>•  Bomba de infusión: dispositivo que administra fármacos; frecuentemente en red. Característica: una manipulación de dosis puede ser letal.</a:t>
-            </a:r>
-          </a:p>
-          <a:p>
-            <a:pPr>
-              <a:spcAft>
-                <a:spcPts val="600"/>
-              </a:spcAft>
-            </a:pPr>
-            <a:r>
-              <a:rPr sz="1500">
-                <a:solidFill>
-                  <a:srgbClr val="22282E"/>
-                </a:solidFill>
-              </a:rPr>
-              <a:t>•  Safety vs. security: safety protege al paciente de fallos; security protege de ataques. Característica: en medicina, security es un requisito de safety.</a:t>
-            </a:r>
-          </a:p>
-          <a:p>
-            <a:pPr>
-              <a:spcAft>
-                <a:spcPts val="600"/>
-              </a:spcAft>
-            </a:pPr>
-            <a:r>
-              <a:rPr sz="1500">
-                <a:solidFill>
-                  <a:srgbClr val="22282E"/>
-                </a:solidFill>
-              </a:rPr>
-              <a:t>•  IEC 62304: estándar del ciclo de vida del software de dispositivos médicos. Característica: exige gestión de riesgos del software.</a:t>
-            </a:r>
-          </a:p>
-          <a:p>
-            <a:pPr>
-              <a:spcAft>
-                <a:spcPts val="600"/>
-              </a:spcAft>
-            </a:pPr>
-            <a:r>
-              <a:rPr sz="1500">
-                <a:solidFill>
-                  <a:srgbClr val="22282E"/>
-                </a:solidFill>
-              </a:rPr>
-              <a:t>•  IEC 80001: gestión de riesgo de dispositivos médicos en redes de TI. Característica: gobierna su integración hospitalaria.</a:t>
-            </a:r>
-          </a:p>
-          <a:p>
-            <a:pPr>
-              <a:spcAft>
-                <a:spcPts val="600"/>
-              </a:spcAft>
-            </a:pPr>
-            <a:r>
-              <a:rPr sz="1500">
-                <a:solidFill>
-                  <a:srgbClr val="22282E"/>
-                </a:solidFill>
-              </a:rPr>
-              <a:t>•  SBOM (Software Bill of Materials): inventario de componentes de software. Característica: la FDA lo exige para rastrear vulnerabilidades de terceros.</a:t>
+              <a:t>•  Un dispositivo médico puede incluir hardware, software, red hospitalaria, servicio remoto y procesos humanos. La pregunta no termina en «¿puede explotarse?»: se rastrea si una pérdida de integridad…</a:t>
+            </a:r>
+          </a:p>
+          <a:p>
+            <a:pPr>
+              <a:spcAft>
+                <a:spcPts val="600"/>
+              </a:spcAft>
+            </a:pPr>
+            <a:r>
+              <a:rPr sz="1500">
+                <a:solidFill>
+                  <a:srgbClr val="22282E"/>
+                </a:solidFill>
+              </a:rPr>
+              <a:t>•  La guía final de FDA de febrero de 2026 aborda diseño, sistema de calidad y contenido de presentaciones previas a mercado para dispositivos con riesgo de ciberseguridad. La legislación estadounidense…</a:t>
+            </a:r>
+          </a:p>
+          <a:p>
+            <a:pPr>
+              <a:spcAft>
+                <a:spcPts val="600"/>
+              </a:spcAft>
+            </a:pPr>
+            <a:r>
+              <a:rPr sz="1500">
+                <a:solidFill>
+                  <a:srgbClr val="22282E"/>
+                </a:solidFill>
+              </a:rPr>
+              <a:t>•  Parchar exige comprobar compatibilidad, validación y ventana clínica. Aplazar indefinidamente tampoco es neutral: se documentan riesgo residual y mitigaciones como segmentación, deshabilitar…</a:t>
+            </a:r>
+          </a:p>
+          <a:p>
+            <a:pPr>
+              <a:spcAft>
+                <a:spcPts val="600"/>
+              </a:spcAft>
+            </a:pPr>
+            <a:r>
+              <a:rPr sz="1500">
+                <a:solidFill>
+                  <a:srgbClr val="22282E"/>
+                </a:solidFill>
+              </a:rPr>
+              <a:t>•  Las pruebas se realizan en gemelos, simuladores o dispositivos retirados y descontaminados, sin conexión a pacientes ni redes clínicas. Un hallazgo se comunica coordinadamente y evita detalles que…</a:t>
+            </a:r>
+          </a:p>
+          <a:p>
+            <a:pPr>
+              <a:spcAft>
+                <a:spcPts val="600"/>
+              </a:spcAft>
+            </a:pPr>
+            <a:r>
+              <a:rPr sz="1500">
+                <a:solidFill>
+                  <a:srgbClr val="22282E"/>
+                </a:solidFill>
+              </a:rPr>
+              <a:t>•  El fabricante publica una corrección para un monitor. El hospital no la instala de inmediato porque requiere validación con su central, pero segmenta el equipo, bloquea acceso remoto y programa…</a:t>
             </a:r>
           </a:p>
         </p:txBody>
@@ -4271,7 +4767,7 @@
                   <a:srgbClr val="0B3D2E"/>
                 </a:solidFill>
               </a:rPr>
-              <a:t>🧰 Herramientas y preparación</a:t>
+              <a:t>📔 Glosario operativo</a:t>
             </a:r>
           </a:p>
         </p:txBody>
@@ -4309,82 +4805,82 @@
                   <a:srgbClr val="22282E"/>
                 </a:solidFill>
               </a:rPr>
-              <a:t>•  Solo unidades de laboratorio propias / retiradas de servicio o simuladores; nunca dispositivos clínicos activos.</a:t>
-            </a:r>
-          </a:p>
-          <a:p>
-            <a:pPr>
-              <a:spcAft>
-                <a:spcPts val="600"/>
-              </a:spcAft>
-            </a:pPr>
-            <a:r>
-              <a:rPr sz="1500">
-                <a:solidFill>
-                  <a:srgbClr val="22282E"/>
-                </a:solidFill>
-              </a:rPr>
-              <a:t>•  Técnicas heredadas de esta parte: análisis de firmware (267), hardware UART/JTAG (268), SDR (269) y BLE (271) aplicadas éticamente.</a:t>
-            </a:r>
-          </a:p>
-          <a:p>
-            <a:pPr>
-              <a:spcAft>
-                <a:spcPts val="600"/>
-              </a:spcAft>
-            </a:pPr>
-            <a:r>
-              <a:rPr sz="1500">
-                <a:solidFill>
-                  <a:srgbClr val="22282E"/>
-                </a:solidFill>
-              </a:rPr>
-              <a:t>•  Documentación regulatoria: FDA guidance, MDS2 (Manufacturer Disclosure Statement for Medical Device Security).</a:t>
-            </a:r>
-          </a:p>
-          <a:p>
-            <a:pPr>
-              <a:spcAft>
-                <a:spcPts val="600"/>
-              </a:spcAft>
-            </a:pPr>
-            <a:r>
-              <a:rPr sz="1500">
-                <a:solidFill>
-                  <a:srgbClr val="22282E"/>
-                </a:solidFill>
-              </a:rPr>
-              <a:t>•  Enfoque de esta clase: mayormente conceptual, regulatorio y de proceso.</a:t>
-            </a:r>
-          </a:p>
-          <a:p>
-            <a:pPr>
-              <a:spcAft>
-                <a:spcPts val="600"/>
-              </a:spcAft>
-            </a:pPr>
-            <a:r>
-              <a:rPr sz="1500">
-                <a:solidFill>
-                  <a:srgbClr val="22282E"/>
-                </a:solidFill>
-              </a:rPr>
-              <a:t>•  El laboratorio práctico consiste en análisis de caso, modelado de amenazas</a:t>
-            </a:r>
-          </a:p>
-          <a:p>
-            <a:pPr>
-              <a:spcAft>
-                <a:spcPts val="600"/>
-              </a:spcAft>
-            </a:pPr>
-            <a:r>
-              <a:rPr sz="1500">
-                <a:solidFill>
-                  <a:srgbClr val="22282E"/>
-                </a:solidFill>
-              </a:rPr>
-              <a:t>•  y redacción de un informe de divulgación coordinada — NO en atacar hardware médico real.</a:t>
+              <a:t>•  Término — Definición útil</a:t>
+            </a:r>
+          </a:p>
+          <a:p>
+            <a:pPr>
+              <a:spcAft>
+                <a:spcPts val="600"/>
+              </a:spcAft>
+            </a:pPr>
+            <a:r>
+              <a:rPr sz="1500">
+                <a:solidFill>
+                  <a:srgbClr val="22282E"/>
+                </a:solidFill>
+              </a:rPr>
+              <a:t>•  Cyber device — Categoría legal estadounidense definida por FD&amp;C Act; no todo dispositivo mundial.</a:t>
+            </a:r>
+          </a:p>
+          <a:p>
+            <a:pPr>
+              <a:spcAft>
+                <a:spcPts val="600"/>
+              </a:spcAft>
+            </a:pPr>
+            <a:r>
+              <a:rPr sz="1500">
+                <a:solidFill>
+                  <a:srgbClr val="22282E"/>
+                </a:solidFill>
+              </a:rPr>
+              <a:t>•  TPLC — Gestión del producto durante diseño, mercado, soporte y retiro.</a:t>
+            </a:r>
+          </a:p>
+          <a:p>
+            <a:pPr>
+              <a:spcAft>
+                <a:spcPts val="600"/>
+              </a:spcAft>
+            </a:pPr>
+            <a:r>
+              <a:rPr sz="1500">
+                <a:solidFill>
+                  <a:srgbClr val="22282E"/>
+                </a:solidFill>
+              </a:rPr>
+              <a:t>•  SBOM — Inventario de componentes que acelera evaluación, sin demostrar seguridad.</a:t>
+            </a:r>
+          </a:p>
+          <a:p>
+            <a:pPr>
+              <a:spcAft>
+                <a:spcPts val="600"/>
+              </a:spcAft>
+            </a:pPr>
+            <a:r>
+              <a:rPr sz="1500">
+                <a:solidFill>
+                  <a:srgbClr val="22282E"/>
+                </a:solidFill>
+              </a:rPr>
+              <a:t>•  CVD — Divulgación coordinada de vulnerabilidades.</a:t>
+            </a:r>
+          </a:p>
+          <a:p>
+            <a:pPr>
+              <a:spcAft>
+                <a:spcPts val="600"/>
+              </a:spcAft>
+            </a:pPr>
+            <a:r>
+              <a:rPr sz="1500">
+                <a:solidFill>
+                  <a:srgbClr val="22282E"/>
+                </a:solidFill>
+              </a:rPr>
+              <a:t>•  Daño clínico — Consecuencia sobre paciente, diagnóstico, terapia o continuidad.</a:t>
             </a:r>
           </a:p>
         </p:txBody>
@@ -4435,7 +4931,7 @@
                   <a:srgbClr val="0B3D2E"/>
                 </a:solidFill>
               </a:rPr>
-              <a:t>🧪 Laboratorio guiado</a:t>
+              <a:t>✅ Criterio de dominio</a:t>
             </a:r>
           </a:p>
         </p:txBody>
@@ -4473,97 +4969,7 @@
                   <a:srgbClr val="22282E"/>
                 </a:solidFill>
               </a:rPr>
-              <a:t>•  Elige un caso público documentado (p. ej. vulnerabilidades divulgadas en bombas de infusión o marcapasos) a partir de avisos de la FDA/ICS-CERT (CISA).</a:t>
-            </a:r>
-          </a:p>
-          <a:p>
-            <a:pPr>
-              <a:spcAft>
-                <a:spcPts val="600"/>
-              </a:spcAft>
-            </a:pPr>
-            <a:r>
-              <a:rPr sz="1500">
-                <a:solidFill>
-                  <a:srgbClr val="22282E"/>
-                </a:solidFill>
-              </a:rPr>
-              <a:t>•  Modela la amenaza: identifica activos (paciente, dosis, telemetría), vectores (RF, red, físico) y consecuencias de safety.</a:t>
-            </a:r>
-          </a:p>
-          <a:p>
-            <a:pPr>
-              <a:spcAft>
-                <a:spcPts val="600"/>
-              </a:spcAft>
-            </a:pPr>
-            <a:r>
-              <a:rPr sz="1500">
-                <a:solidFill>
-                  <a:srgbClr val="22282E"/>
-                </a:solidFill>
-              </a:rPr>
-              <a:t>•  Mapea la superficie de ataque por capas (app clínica, red hospitalaria, RF del implante, firmware) reutilizando el enfoque de la clase 266.</a:t>
-            </a:r>
-          </a:p>
-          <a:p>
-            <a:pPr>
-              <a:spcAft>
-                <a:spcPts val="600"/>
-              </a:spcAft>
-            </a:pPr>
-            <a:r>
-              <a:rPr sz="1500">
-                <a:solidFill>
-                  <a:srgbClr val="22282E"/>
-                </a:solidFill>
-              </a:rPr>
-              <a:t>•  Evalúa controles existentes: cifrado de telemetría, autenticación, límites de dosis codificados por hardware, watchdog.</a:t>
-            </a:r>
-          </a:p>
-          <a:p>
-            <a:pPr>
-              <a:spcAft>
-                <a:spcPts val="600"/>
-              </a:spcAft>
-            </a:pPr>
-            <a:r>
-              <a:rPr sz="1500">
-                <a:solidFill>
-                  <a:srgbClr val="22282E"/>
-                </a:solidFill>
-              </a:rPr>
-              <a:t>•  Aplica el marco regulatorio: relaciona el caso con requisitos de la guía de la FDA, IEC 62304 y IEC 80001.</a:t>
-            </a:r>
-          </a:p>
-          <a:p>
-            <a:pPr>
-              <a:spcAft>
-                <a:spcPts val="600"/>
-              </a:spcAft>
-            </a:pPr>
-            <a:r>
-              <a:rPr sz="1500">
-                <a:solidFill>
-                  <a:srgbClr val="22282E"/>
-                </a:solidFill>
-              </a:rPr>
-              <a:t>•  Redacta una divulgación coordinada: simula un informe responsable dirigido al fabricante (impacto, reproducción a alto nivel, plazo, sin exploit público).</a:t>
-            </a:r>
-          </a:p>
-          <a:p>
-            <a:pPr>
-              <a:spcAft>
-                <a:spcPts val="600"/>
-              </a:spcAft>
-            </a:pPr>
-            <a:r>
-              <a:rPr sz="1500">
-                <a:solidFill>
-                  <a:srgbClr val="22282E"/>
-                </a:solidFill>
-              </a:rPr>
-              <a:t>•  Propón mitigaciones: SBOM, segmentación de red clínica, actualizaciones firmadas, límites de seguridad físicos.</a:t>
+              <a:t>•  El alumno domina la clase cuando conecta una amenaza con una consecuencia clínica, reparte responsabilidades, diseña parche y mitigación temporal y prepara divulgación sin probar sobre pacientes ni…</a:t>
             </a:r>
           </a:p>
         </p:txBody>
@@ -4614,7 +5020,7 @@
                   <a:srgbClr val="0B3D2E"/>
                 </a:solidFill>
               </a:rPr>
-              <a:t>✍️ Ejercicios</a:t>
+              <a:t>📖 Definiciones y características</a:t>
             </a:r>
           </a:p>
         </p:txBody>
@@ -4652,82 +5058,82 @@
                   <a:srgbClr val="22282E"/>
                 </a:solidFill>
               </a:rPr>
-              <a:t>•  Enumera la superficie de ataque de un marcapasos con telemetría inalámbrica.</a:t>
-            </a:r>
-          </a:p>
-          <a:p>
-            <a:pPr>
-              <a:spcAft>
-                <a:spcPts val="600"/>
-              </a:spcAft>
-            </a:pPr>
-            <a:r>
-              <a:rPr sz="1500">
-                <a:solidFill>
-                  <a:srgbClr val="22282E"/>
-                </a:solidFill>
-              </a:rPr>
-              <a:t>•  Explica por qué en medicina la seguridad es un requisito de safety.</a:t>
-            </a:r>
-          </a:p>
-          <a:p>
-            <a:pPr>
-              <a:spcAft>
-                <a:spcPts val="600"/>
-              </a:spcAft>
-            </a:pPr>
-            <a:r>
-              <a:rPr sz="1500">
-                <a:solidFill>
-                  <a:srgbClr val="22282E"/>
-                </a:solidFill>
-              </a:rPr>
-              <a:t>•  Resume una vulnerabilidad médica real divulgada y su impacto potencial.</a:t>
-            </a:r>
-          </a:p>
-          <a:p>
-            <a:pPr>
-              <a:spcAft>
-                <a:spcPts val="600"/>
-              </a:spcAft>
-            </a:pPr>
-            <a:r>
-              <a:rPr sz="1500">
-                <a:solidFill>
-                  <a:srgbClr val="22282E"/>
-                </a:solidFill>
-              </a:rPr>
-              <a:t>•  Relaciona un hallazgo con IEC 62304 e IEC 80001.</a:t>
-            </a:r>
-          </a:p>
-          <a:p>
-            <a:pPr>
-              <a:spcAft>
-                <a:spcPts val="600"/>
-              </a:spcAft>
-            </a:pPr>
-            <a:r>
-              <a:rPr sz="1500">
-                <a:solidFill>
-                  <a:srgbClr val="22282E"/>
-                </a:solidFill>
-              </a:rPr>
-              <a:t>•  Redacta un borrador de aviso de divulgación coordinada.</a:t>
-            </a:r>
-          </a:p>
-          <a:p>
-            <a:pPr>
-              <a:spcAft>
-                <a:spcPts val="600"/>
-              </a:spcAft>
-            </a:pPr>
-            <a:r>
-              <a:rPr sz="1500">
-                <a:solidFill>
-                  <a:srgbClr val="22282E"/>
-                </a:solidFill>
-              </a:rPr>
-              <a:t>•  Diseña un límite de seguridad de hardware que evite una sobredosis por software.</a:t>
+              <a:t>•  Dispositivo médico implantable (IMD): dispositivo dentro del cuerpo (marcapasos, DAI) con telemetría inalámbrica. Característica: restricciones severas de energía y de seguridad del paciente.</a:t>
+            </a:r>
+          </a:p>
+          <a:p>
+            <a:pPr>
+              <a:spcAft>
+                <a:spcPts val="600"/>
+              </a:spcAft>
+            </a:pPr>
+            <a:r>
+              <a:rPr sz="1500">
+                <a:solidFill>
+                  <a:srgbClr val="22282E"/>
+                </a:solidFill>
+              </a:rPr>
+              <a:t>•  Bomba de infusión: dispositivo que administra fármacos; frecuentemente en red. Característica: una manipulación de dosis puede ser letal.</a:t>
+            </a:r>
+          </a:p>
+          <a:p>
+            <a:pPr>
+              <a:spcAft>
+                <a:spcPts val="600"/>
+              </a:spcAft>
+            </a:pPr>
+            <a:r>
+              <a:rPr sz="1500">
+                <a:solidFill>
+                  <a:srgbClr val="22282E"/>
+                </a:solidFill>
+              </a:rPr>
+              <a:t>•  Safety vs. security: safety protege al paciente de fallos; security protege de ataques. Característica: en medicina, security es un requisito de safety.</a:t>
+            </a:r>
+          </a:p>
+          <a:p>
+            <a:pPr>
+              <a:spcAft>
+                <a:spcPts val="600"/>
+              </a:spcAft>
+            </a:pPr>
+            <a:r>
+              <a:rPr sz="1500">
+                <a:solidFill>
+                  <a:srgbClr val="22282E"/>
+                </a:solidFill>
+              </a:rPr>
+              <a:t>•  IEC 62304: estándar del ciclo de vida del software de dispositivos médicos. Característica: exige gestión de riesgos del software.</a:t>
+            </a:r>
+          </a:p>
+          <a:p>
+            <a:pPr>
+              <a:spcAft>
+                <a:spcPts val="600"/>
+              </a:spcAft>
+            </a:pPr>
+            <a:r>
+              <a:rPr sz="1500">
+                <a:solidFill>
+                  <a:srgbClr val="22282E"/>
+                </a:solidFill>
+              </a:rPr>
+              <a:t>•  IEC 80001: gestión de riesgo de dispositivos médicos en redes de TI. Característica: gobierna su integración hospitalaria.</a:t>
+            </a:r>
+          </a:p>
+          <a:p>
+            <a:pPr>
+              <a:spcAft>
+                <a:spcPts val="600"/>
+              </a:spcAft>
+            </a:pPr>
+            <a:r>
+              <a:rPr sz="1500">
+                <a:solidFill>
+                  <a:srgbClr val="22282E"/>
+                </a:solidFill>
+              </a:rPr>
+              <a:t>•  SBOM (Software Bill of Materials): inventario de componentes de software. Característica: la FDA lo exige para rastrear vulnerabilidades de terceros.</a:t>
             </a:r>
           </a:p>
         </p:txBody>
@@ -4778,7 +5184,7 @@
                   <a:srgbClr val="0B3D2E"/>
                 </a:solidFill>
               </a:rPr>
-              <a:t>📝 Reto verificable</a:t>
+              <a:t>🧰 Herramientas y preparación</a:t>
             </a:r>
           </a:p>
         </p:txBody>
@@ -4816,7 +5222,37 @@
                   <a:srgbClr val="22282E"/>
                 </a:solidFill>
               </a:rPr>
-              <a:t>•  Elabora un informe de evaluación de riesgo y divulgación coordinada para un dispositivo médico (basado en un caso público o una unidad de laboratorio propia). Criterio de aceptación: el informe incluye un modelo de amenazas con al menos tres vectores, mapea cada riesgo a un requisito regulatorio concreto (FDA/IEC), y propone un proceso de divulgación responsable con plazos, sin publicar ningún exploit funcional.</a:t>
+              <a:t>•  Solo unidades de laboratorio propias / retiradas de servicio o simuladores; nunca dispositivos clínicos activos.</a:t>
+            </a:r>
+          </a:p>
+          <a:p>
+            <a:pPr>
+              <a:spcAft>
+                <a:spcPts val="600"/>
+              </a:spcAft>
+            </a:pPr>
+            <a:r>
+              <a:rPr sz="1500">
+                <a:solidFill>
+                  <a:srgbClr val="22282E"/>
+                </a:solidFill>
+              </a:rPr>
+              <a:t>•  Técnicas heredadas de esta parte: análisis de firmware (267), hardware UART/JTAG (268), SDR (269) y BLE (271) aplicadas éticamente.</a:t>
+            </a:r>
+          </a:p>
+          <a:p>
+            <a:pPr>
+              <a:spcAft>
+                <a:spcPts val="600"/>
+              </a:spcAft>
+            </a:pPr>
+            <a:r>
+              <a:rPr sz="1500">
+                <a:solidFill>
+                  <a:srgbClr val="22282E"/>
+                </a:solidFill>
+              </a:rPr>
+              <a:t>•  Documentación regulatoria: FDA guidance, MDS2 (Manufacturer Disclosure Statement for Medical Device Security).</a:t>
             </a:r>
           </a:p>
         </p:txBody>
